--- a/assets/powerpoints/module-n6-relations/C3-avant-ou-apres-le-nom-ce-n-est-pas-la-meme-chose.pptx
+++ b/assets/powerpoints/module-n6-relations/C3-avant-ou-apres-le-nom-ce-n-est-pas-la-meme-chose.pptx
@@ -4223,7 +4223,7 @@
                 </a:solidFill>
                 <a:latin typeface="Verdana"/>
               </a:rPr>
-              <a:t>SÉANCE C3  ·  MODULE 3</a:t>
+              <a:t>SÉANCE C3  ·  MODULE 4</a:t>
             </a:r>
           </a:p>
         </p:txBody>
